--- a/decks/hist-medicine/hist-medicine_ch2_causes-of-disease.pptx
+++ b/decks/hist-medicine/hist-medicine_ch2_causes-of-disease.pptx
@@ -125,30 +125,30 @@
   <p:extLst>
     <p:ext uri="{521415D9-36F7-43E2-AB2F-B90AF26B5E84}">
       <p14:sectionLst xmlns:p14="http://schemas.microsoft.com/office/powerpoint/2010/main">
-        <p14:section name="Opening" id="{17bbadd1-fe87-ace3-0435-4dd184e8c6c8}">
+        <p14:section name="Opening" id="{3481b34b-e0bd-f89e-072f-be94af54d0c2}">
           <p14:sldIdLst>
             <p14:sldId id="256"/>
           </p14:sldIdLst>
         </p14:section>
-        <p14:section name="Gate" id="{ba9b067d-a217-ff19-8dfe-c43b04afe927}">
+        <p14:section name="Gate" id="{52a207e7-8f3f-ea18-8f03-40c5dde2c951}">
           <p14:sldIdLst>
             <p14:sldId id="257"/>
             <p14:sldId id="258"/>
           </p14:sldIdLst>
         </p14:section>
-        <p14:section name="Pre-teach" id="{ecdd2e23-794b-c0ab-bf61-7976ea01319b}">
+        <p14:section name="Pre-teach" id="{1c284e18-98ca-cfb2-e63f-6e64f16f9df1}">
           <p14:sldIdLst>
             <p14:sldId id="259"/>
             <p14:sldId id="260"/>
           </p14:sldIdLst>
         </p14:section>
-        <p14:section name="Read-along" id="{c1ede5da-6e6f-c24e-b45d-2aed7baca7c5}">
+        <p14:section name="Read-along" id="{08cdf121-d27f-4b60-f38c-599bc965a71f}">
           <p14:sldIdLst>
             <p14:sldId id="261"/>
             <p14:sldId id="262"/>
           </p14:sldIdLst>
         </p14:section>
-        <p14:section name="Teach" id="{897bc69d-c230-c9c0-2f73-a8fbd43a4664}">
+        <p14:section name="Teach" id="{736b40f8-2141-6b60-56d3-1c2da2f40be8}">
           <p14:sldIdLst>
             <p14:sldId id="263"/>
             <p14:sldId id="264"/>
@@ -156,7 +156,7 @@
             <p14:sldId id="266"/>
           </p14:sldIdLst>
         </p14:section>
-        <p14:section name="Routes" id="{e02a1c56-38b1-c616-7cc9-0061c37453b5}">
+        <p14:section name="Routes" id="{a6c95056-28fb-42df-fdcf-f2823018219a}">
           <p14:sldIdLst>
             <p14:sldId id="267"/>
             <p14:sldId id="268"/>
@@ -164,12 +164,12 @@
             <p14:sldId id="270"/>
           </p14:sldIdLst>
         </p14:section>
-        <p14:section name="Close" id="{d6f3f23d-2d10-1061-cdfd-e2265c5910fe}">
+        <p14:section name="Close" id="{61db6970-0825-3874-d0c6-c97284398408}">
           <p14:sldIdLst>
             <p14:sldId id="271"/>
           </p14:sldIdLst>
         </p14:section>
-        <p14:section name="Answers" id="{8107ccdd-ef8f-0eb5-2d32-be86441c9fb0}">
+        <p14:section name="Answers" id="{5a3d320d-c224-0e63-1e9e-5c3cbcf1944d}">
           <p14:sldIdLst>
             <p14:sldId id="272"/>
             <p14:sldId id="273"/>
@@ -1416,7 +1416,7 @@
             <a:r>
               <a:rPr lang="en-US" dirty="0"/>
               <a:t>Answers — task 2: Spot the idea. Reveal the answer; pupils mark their own work in a different colour, then read the "why" together. Same destination for every lane, so one answer serves the whole class.
-Answer: A   Miasma
+Answer: D   Miasma
 Why: Each story blames something different. A smell, foul air or rotting rubbish is miasma; the stars are astrology; sin is religion; liquids inside the body are the Four Humours.
 Ask a Support pupil to explain one step, and a Stretch pupil to share their extension.</a:t>
             </a:r>
@@ -1600,7 +1600,7 @@
               <a:t>Do now — retrieval. Silent, no notes, no help: recall comes before any support. Give about four minutes.
 1. What did the Church teach was the cause of disease?  →  A   God sent it as a punishment for sin or as a test of faith
 2. The idea that bad air and bad smells caused disease is called ___.  →  miasma
-3. Which of these counts as a rational explanation of disease?  →  A   Miasma: bad smells from dirt and rotting matter carried disease
+3. Which of these counts as a rational explanation of disease?  →  C   Miasma: bad smells from dirt and rotting matter carried disease
 Circulate: who gets 3/3 (Stretch route), 2/3 (Core), 0–1 (Support)? Use this to route pupils later in the lesson.</a:t>
             </a:r>
             <a:endParaRPr lang="en-US" dirty="0"/>
@@ -1692,7 +1692,7 @@
               <a:t>Answers — pupils mark their own in a different colour, then hands up for 3/3, 2/3, 1/3.
 1. A   God sent it as a punishment for sin or as a test of faith. The Church taught that God sent disease to punish sin or to test faith. Nobody in medieval England knew about germs.
 2. miasma. Miasma means bad or corrupted air. People believed breathing it in made you ill.
-3. A   Miasma: bad smells from dirt and rotting matter carried disease. Rational explanations seem to make sense from what people could see, even though they were not scientific. Miasma pointed to real dirt and real smells.
+3. C   Miasma: bad smells from dirt and rotting matter carried disease. Rational explanations seem to make sense from what people could see, even though they were not scientific. Miasma pointed to real dirt and real smells.
 Say the route each score points to: 3/3 Stretch, 2/3 Core, 0–1 Support. Pupils may choose to move up.</a:t>
             </a:r>
             <a:endParaRPr lang="en-US" dirty="0"/>
@@ -8076,7 +8076,7 @@
                 <a:ea typeface="Calibri" pitchFamily="34" charset="-122"/>
                 <a:cs typeface="Calibri" pitchFamily="34" charset="-120"/>
               </a:rPr>
-              <a:t>Miasma      </a:t>
+              <a:t>Astrology      </a:t>
             </a:r>
             <a:pPr algn="ctr" indent="0" marL="0">
               <a:buNone/>
@@ -8104,7 +8104,7 @@
                 <a:ea typeface="Calibri" pitchFamily="34" charset="-122"/>
                 <a:cs typeface="Calibri" pitchFamily="34" charset="-120"/>
               </a:rPr>
-              <a:t>Astrology      </a:t>
+              <a:t>The Four Humours      </a:t>
             </a:r>
             <a:pPr algn="ctr" indent="0" marL="0">
               <a:buNone/>
@@ -8160,7 +8160,7 @@
                 <a:ea typeface="Calibri" pitchFamily="34" charset="-122"/>
                 <a:cs typeface="Calibri" pitchFamily="34" charset="-120"/>
               </a:rPr>
-              <a:t>The Four Humours</a:t>
+              <a:t>Miasma</a:t>
             </a:r>
             <a:endParaRPr lang="en-US" sz="2600" dirty="0"/>
           </a:p>
@@ -9564,7 +9564,7 @@
                 <a:ea typeface="Calibri" pitchFamily="34" charset="-122"/>
                 <a:cs typeface="Calibri" pitchFamily="34" charset="-120"/>
               </a:rPr>
-              <a:t>Fleas living on black rats spread it</a:t>
+              <a:t>Dirty water from rivers carried it</a:t>
             </a:r>
             <a:endParaRPr lang="en-US" sz="2400" dirty="0"/>
           </a:p>
@@ -9601,7 +9601,7 @@
                 <a:ea typeface="Calibri" pitchFamily="34" charset="-122"/>
                 <a:cs typeface="Calibri" pitchFamily="34" charset="-120"/>
               </a:rPr>
-              <a:t>Dirty water from rivers carried it</a:t>
+              <a:t>Tiny living things called germs caused it</a:t>
             </a:r>
             <a:endParaRPr lang="en-US" sz="2400" dirty="0"/>
           </a:p>
@@ -9638,7 +9638,7 @@
                 <a:ea typeface="Calibri" pitchFamily="34" charset="-122"/>
                 <a:cs typeface="Calibri" pitchFamily="34" charset="-120"/>
               </a:rPr>
-              <a:t>Tiny living things called germs caused it</a:t>
+              <a:t>Fleas living on black rats spread it</a:t>
             </a:r>
             <a:endParaRPr lang="en-US" sz="2400" dirty="0"/>
           </a:p>
@@ -10687,7 +10687,7 @@
                 <a:ea typeface="Cambria" pitchFamily="34" charset="-122"/>
                 <a:cs typeface="Cambria" pitchFamily="34" charset="-120"/>
               </a:rPr>
-              <a:t>A   Miasma</a:t>
+              <a:t>D   Miasma</a:t>
             </a:r>
             <a:endParaRPr lang="en-US" sz="1800" dirty="0"/>
           </a:p>
@@ -11717,7 +11717,7 @@
                 <a:ea typeface="Calibri" pitchFamily="34" charset="-122"/>
                 <a:cs typeface="Calibri" pitchFamily="34" charset="-120"/>
               </a:rPr>
-              <a:t>Fleas living on black rats spread it</a:t>
+              <a:t>Dirty water from rivers carried it</a:t>
             </a:r>
             <a:endParaRPr lang="en-US" sz="1800" dirty="0"/>
           </a:p>
@@ -11754,7 +11754,7 @@
                 <a:ea typeface="Calibri" pitchFamily="34" charset="-122"/>
                 <a:cs typeface="Calibri" pitchFamily="34" charset="-120"/>
               </a:rPr>
-              <a:t>Dirty water from rivers carried it</a:t>
+              <a:t>Tiny living things called germs caused it</a:t>
             </a:r>
             <a:endParaRPr lang="en-US" sz="1800" dirty="0"/>
           </a:p>
@@ -11791,7 +11791,7 @@
                 <a:ea typeface="Calibri" pitchFamily="34" charset="-122"/>
                 <a:cs typeface="Calibri" pitchFamily="34" charset="-120"/>
               </a:rPr>
-              <a:t>Tiny living things called germs caused it</a:t>
+              <a:t>Fleas living on black rats spread it</a:t>
             </a:r>
             <a:endParaRPr lang="en-US" sz="1800" dirty="0"/>
           </a:p>
@@ -12193,7 +12193,7 @@
                 <a:ea typeface="Calibri" pitchFamily="34" charset="-122"/>
                 <a:cs typeface="Calibri" pitchFamily="34" charset="-120"/>
               </a:rPr>
-              <a:t>Miasma: bad smells from dirt and rotting matter carried disease</a:t>
+              <a:t>The planets lined up in an unlucky way</a:t>
             </a:r>
             <a:endParaRPr lang="en-US" sz="1800" dirty="0"/>
           </a:p>
@@ -12230,7 +12230,7 @@
                 <a:ea typeface="Calibri" pitchFamily="34" charset="-122"/>
                 <a:cs typeface="Calibri" pitchFamily="34" charset="-120"/>
               </a:rPr>
-              <a:t>God sent disease as a punishment for sin</a:t>
+              <a:t>The devil put a curse on the village</a:t>
             </a:r>
             <a:endParaRPr lang="en-US" sz="1800" dirty="0"/>
           </a:p>
@@ -12267,7 +12267,7 @@
                 <a:ea typeface="Calibri" pitchFamily="34" charset="-122"/>
                 <a:cs typeface="Calibri" pitchFamily="34" charset="-120"/>
               </a:rPr>
-              <a:t>The planets lined up in an unlucky way</a:t>
+              <a:t>Miasma: bad smells from dirt and rotting matter carried disease</a:t>
             </a:r>
             <a:endParaRPr lang="en-US" sz="1800" dirty="0"/>
           </a:p>
@@ -12304,7 +12304,7 @@
                 <a:ea typeface="Calibri" pitchFamily="34" charset="-122"/>
                 <a:cs typeface="Calibri" pitchFamily="34" charset="-120"/>
               </a:rPr>
-              <a:t>The devil put a curse on the village</a:t>
+              <a:t>God sent disease as a punishment for sin</a:t>
             </a:r>
             <a:endParaRPr lang="en-US" sz="1800" dirty="0"/>
           </a:p>
@@ -13205,7 +13205,7 @@
                 <a:ea typeface="Calibri" pitchFamily="34" charset="-122"/>
                 <a:cs typeface="Calibri" pitchFamily="34" charset="-120"/>
               </a:rPr>
-              <a:t>A   Miasma: bad smells from dirt and rotting matter carried disease</a:t>
+              <a:t>C   Miasma: bad smells from dirt and rotting matter carried disease</a:t>
             </a:r>
             <a:endParaRPr lang="en-US" sz="2200" dirty="0"/>
           </a:p>

--- a/decks/hist-medicine/hist-medicine_ch2_causes-of-disease.pptx
+++ b/decks/hist-medicine/hist-medicine_ch2_causes-of-disease.pptx
@@ -125,30 +125,30 @@
   <p:extLst>
     <p:ext uri="{521415D9-36F7-43E2-AB2F-B90AF26B5E84}">
       <p14:sectionLst xmlns:p14="http://schemas.microsoft.com/office/powerpoint/2010/main">
-        <p14:section name="Opening" id="{3481b34b-e0bd-f89e-072f-be94af54d0c2}">
+        <p14:section name="Opening" id="{8285360d-b5cb-4886-1a99-9a136189f89b}">
           <p14:sldIdLst>
             <p14:sldId id="256"/>
           </p14:sldIdLst>
         </p14:section>
-        <p14:section name="Gate" id="{52a207e7-8f3f-ea18-8f03-40c5dde2c951}">
+        <p14:section name="Gate" id="{d7024ad0-87f9-badf-d658-b5d2d1d6cff6}">
           <p14:sldIdLst>
             <p14:sldId id="257"/>
             <p14:sldId id="258"/>
           </p14:sldIdLst>
         </p14:section>
-        <p14:section name="Pre-teach" id="{1c284e18-98ca-cfb2-e63f-6e64f16f9df1}">
+        <p14:section name="Pre-teach" id="{fa670db6-d02c-6566-8df7-0bac23318454}">
           <p14:sldIdLst>
             <p14:sldId id="259"/>
             <p14:sldId id="260"/>
           </p14:sldIdLst>
         </p14:section>
-        <p14:section name="Read-along" id="{08cdf121-d27f-4b60-f38c-599bc965a71f}">
+        <p14:section name="Read-along" id="{914a40af-113c-350e-7337-11260f0f1646}">
           <p14:sldIdLst>
             <p14:sldId id="261"/>
             <p14:sldId id="262"/>
           </p14:sldIdLst>
         </p14:section>
-        <p14:section name="Teach" id="{736b40f8-2141-6b60-56d3-1c2da2f40be8}">
+        <p14:section name="Teach" id="{6c68f00e-928f-ca9a-8abb-d79675eb0455}">
           <p14:sldIdLst>
             <p14:sldId id="263"/>
             <p14:sldId id="264"/>
@@ -156,7 +156,7 @@
             <p14:sldId id="266"/>
           </p14:sldIdLst>
         </p14:section>
-        <p14:section name="Routes" id="{a6c95056-28fb-42df-fdcf-f2823018219a}">
+        <p14:section name="Routes" id="{dfc86b97-6779-51e2-496e-f94f1f60d676}">
           <p14:sldIdLst>
             <p14:sldId id="267"/>
             <p14:sldId id="268"/>
@@ -164,12 +164,12 @@
             <p14:sldId id="270"/>
           </p14:sldIdLst>
         </p14:section>
-        <p14:section name="Close" id="{61db6970-0825-3874-d0c6-c97284398408}">
+        <p14:section name="Close" id="{49584628-9f4d-2096-ab40-c0e74955c67c}">
           <p14:sldIdLst>
             <p14:sldId id="271"/>
           </p14:sldIdLst>
         </p14:section>
-        <p14:section name="Answers" id="{5a3d320d-c224-0e63-1e9e-5c3cbcf1944d}">
+        <p14:section name="Answers" id="{6a59da2c-1584-3e52-5ca3-433c507fcb70}">
           <p14:sldIdLst>
             <p14:sldId id="272"/>
             <p14:sldId id="273"/>
